--- a/prompt_engineering/pe-2-1_techniques_0Shot_1Shot_FewShot_ChainOfThought_RolePrompting_v2.pptx
+++ b/prompt_engineering/pe-2-1_techniques_0Shot_1Shot_FewShot_ChainOfThought_RolePrompting_v2.pptx
@@ -239,7 +239,7 @@
           <a:p>
             <a:fld id="{7BAEECA8-D063-486F-AE31-5020270C1449}" type="datetimeFigureOut">
               <a:rPr lang="en-US" smtClean="0"/>
-              <a:t>9/20/2026</a:t>
+              <a:t>10/14/2026</a:t>
             </a:fld>
             <a:endParaRPr lang="en-US"/>
           </a:p>
@@ -481,7 +481,7 @@
           <a:p>
             <a:fld id="{6383FAE1-13DE-4511-8C1B-C8AFB720664C}" type="datetimeFigureOut">
               <a:rPr lang="en-US" smtClean="0"/>
-              <a:t>9/20/2026</a:t>
+              <a:t>10/14/2026</a:t>
             </a:fld>
             <a:endParaRPr lang="en-US"/>
           </a:p>
@@ -679,7 +679,7 @@
           <a:p>
             <a:fld id="{6383FAE1-13DE-4511-8C1B-C8AFB720664C}" type="datetimeFigureOut">
               <a:rPr lang="en-US" smtClean="0"/>
-              <a:t>9/20/2026</a:t>
+              <a:t>10/14/2026</a:t>
             </a:fld>
             <a:endParaRPr lang="en-US"/>
           </a:p>
@@ -887,7 +887,7 @@
           <a:p>
             <a:fld id="{6383FAE1-13DE-4511-8C1B-C8AFB720664C}" type="datetimeFigureOut">
               <a:rPr lang="en-US" smtClean="0"/>
-              <a:t>9/20/2026</a:t>
+              <a:t>10/14/2026</a:t>
             </a:fld>
             <a:endParaRPr lang="en-US"/>
           </a:p>
@@ -1085,7 +1085,7 @@
           <a:p>
             <a:fld id="{6383FAE1-13DE-4511-8C1B-C8AFB720664C}" type="datetimeFigureOut">
               <a:rPr lang="en-US" smtClean="0"/>
-              <a:t>9/20/2026</a:t>
+              <a:t>10/14/2026</a:t>
             </a:fld>
             <a:endParaRPr lang="en-US"/>
           </a:p>
@@ -1360,7 +1360,7 @@
           <a:p>
             <a:fld id="{6383FAE1-13DE-4511-8C1B-C8AFB720664C}" type="datetimeFigureOut">
               <a:rPr lang="en-US" smtClean="0"/>
-              <a:t>9/20/2026</a:t>
+              <a:t>10/14/2026</a:t>
             </a:fld>
             <a:endParaRPr lang="en-US"/>
           </a:p>
@@ -1625,7 +1625,7 @@
           <a:p>
             <a:fld id="{6383FAE1-13DE-4511-8C1B-C8AFB720664C}" type="datetimeFigureOut">
               <a:rPr lang="en-US" smtClean="0"/>
-              <a:t>9/20/2026</a:t>
+              <a:t>10/14/2026</a:t>
             </a:fld>
             <a:endParaRPr lang="en-US"/>
           </a:p>
@@ -2037,7 +2037,7 @@
           <a:p>
             <a:fld id="{6383FAE1-13DE-4511-8C1B-C8AFB720664C}" type="datetimeFigureOut">
               <a:rPr lang="en-US" smtClean="0"/>
-              <a:t>9/20/2026</a:t>
+              <a:t>10/14/2026</a:t>
             </a:fld>
             <a:endParaRPr lang="en-US"/>
           </a:p>
@@ -2178,7 +2178,7 @@
           <a:p>
             <a:fld id="{6383FAE1-13DE-4511-8C1B-C8AFB720664C}" type="datetimeFigureOut">
               <a:rPr lang="en-US" smtClean="0"/>
-              <a:t>9/20/2026</a:t>
+              <a:t>10/14/2026</a:t>
             </a:fld>
             <a:endParaRPr lang="en-US"/>
           </a:p>
@@ -2291,7 +2291,7 @@
           <a:p>
             <a:fld id="{6383FAE1-13DE-4511-8C1B-C8AFB720664C}" type="datetimeFigureOut">
               <a:rPr lang="en-US" smtClean="0"/>
-              <a:t>9/20/2026</a:t>
+              <a:t>10/14/2026</a:t>
             </a:fld>
             <a:endParaRPr lang="en-US"/>
           </a:p>
@@ -2602,7 +2602,7 @@
           <a:p>
             <a:fld id="{6383FAE1-13DE-4511-8C1B-C8AFB720664C}" type="datetimeFigureOut">
               <a:rPr lang="en-US" smtClean="0"/>
-              <a:t>9/20/2026</a:t>
+              <a:t>10/14/2026</a:t>
             </a:fld>
             <a:endParaRPr lang="en-US"/>
           </a:p>
@@ -2893,7 +2893,7 @@
           <a:p>
             <a:fld id="{6383FAE1-13DE-4511-8C1B-C8AFB720664C}" type="datetimeFigureOut">
               <a:rPr lang="en-US" smtClean="0"/>
-              <a:t>9/20/2026</a:t>
+              <a:t>10/14/2026</a:t>
             </a:fld>
             <a:endParaRPr lang="en-US"/>
           </a:p>
@@ -3137,7 +3137,7 @@
           <a:p>
             <a:fld id="{6383FAE1-13DE-4511-8C1B-C8AFB720664C}" type="datetimeFigureOut">
               <a:rPr lang="en-US" smtClean="0"/>
-              <a:t>9/20/2026</a:t>
+              <a:t>10/14/2026</a:t>
             </a:fld>
             <a:endParaRPr lang="en-US"/>
           </a:p>
@@ -7716,7 +7716,7 @@
         <p:spPr>
           <a:xfrm>
             <a:off x="274320" y="139160"/>
-            <a:ext cx="9144000" cy="830997"/>
+            <a:ext cx="9144000" cy="461665"/>
           </a:xfrm>
           <a:prstGeom prst="rect">
             <a:avLst/>
@@ -7738,20 +7738,40 @@
                   </a:schemeClr>
                 </a:solidFill>
               </a:rPr>
-              <a:t>2. One-Shot</a:t>
-            </a:r>
-          </a:p>
-          <a:p>
-            <a:r>
-              <a:rPr lang="en-US" sz="2400" dirty="0">
-                <a:solidFill>
-                  <a:schemeClr val="accent6">
-                    <a:lumMod val="60000"/>
-                    <a:lumOff val="40000"/>
-                  </a:schemeClr>
-                </a:solidFill>
-              </a:rPr>
-              <a:t>One example provided.</a:t>
+              <a:t>2</a:t>
+            </a:r>
+            <a:r>
+              <a:rPr lang="en-US" sz="2400" b="1">
+                <a:solidFill>
+                  <a:schemeClr val="accent6">
+                    <a:lumMod val="60000"/>
+                    <a:lumOff val="40000"/>
+                  </a:schemeClr>
+                </a:solidFill>
+              </a:rPr>
+              <a:t>. One-Shot: </a:t>
+            </a:r>
+            <a:r>
+              <a:rPr lang="en-US" sz="2400">
+                <a:solidFill>
+                  <a:schemeClr val="accent6">
+                    <a:lumMod val="60000"/>
+                    <a:lumOff val="40000"/>
+                  </a:schemeClr>
+                </a:solidFill>
+              </a:rPr>
+              <a:t>One </a:t>
+            </a:r>
+            <a:r>
+              <a:rPr lang="en-US" sz="2400" dirty="0">
+                <a:solidFill>
+                  <a:schemeClr val="accent6">
+                    <a:lumMod val="60000"/>
+                    <a:lumOff val="40000"/>
+                  </a:schemeClr>
+                </a:solidFill>
+              </a:rPr>
+              <a:t>example provided.</a:t>
             </a:r>
           </a:p>
         </p:txBody>
@@ -7770,8 +7790,8 @@
         </p:nvSpPr>
         <p:spPr>
           <a:xfrm>
-            <a:off x="274320" y="1190720"/>
-            <a:ext cx="10675620" cy="2677656"/>
+            <a:off x="195298" y="535606"/>
+            <a:ext cx="10675620" cy="3416320"/>
           </a:xfrm>
           <a:prstGeom prst="rect">
             <a:avLst/>
@@ -7785,7 +7805,7 @@
           <a:lstStyle/>
           <a:p>
             <a:r>
-              <a:rPr lang="en-US" sz="2400" dirty="0">
+              <a:rPr lang="en-US" sz="2400">
                 <a:solidFill>
                   <a:schemeClr val="accent6">
                     <a:lumMod val="60000"/>
@@ -7798,46 +7818,103 @@
           </a:p>
           <a:p>
             <a:r>
-              <a:rPr lang="en-US" sz="2400" dirty="0">
-                <a:solidFill>
-                  <a:srgbClr val="FFC000"/>
-                </a:solidFill>
-              </a:rPr>
-              <a:t>Example:</a:t>
-            </a:r>
-          </a:p>
-          <a:p>
-            <a:r>
-              <a:rPr lang="en-US" sz="2400" dirty="0">
-                <a:solidFill>
-                  <a:srgbClr val="FFC000"/>
-                </a:solidFill>
-              </a:rPr>
-              <a:t>Statement: "John lives in Tokyo."</a:t>
-            </a:r>
-          </a:p>
-          <a:p>
-            <a:r>
-              <a:rPr lang="en-US" sz="2400" dirty="0">
-                <a:solidFill>
-                  <a:srgbClr val="FFC000"/>
-                </a:solidFill>
-              </a:rPr>
-              <a:t>Question: "Where does John live?"</a:t>
-            </a:r>
-          </a:p>
-          <a:p>
+              <a:rPr lang="en-US" sz="2400">
+                <a:solidFill>
+                  <a:schemeClr val="accent4">
+                    <a:lumMod val="60000"/>
+                    <a:lumOff val="40000"/>
+                  </a:schemeClr>
+                </a:solidFill>
+              </a:rPr>
+              <a:t>Generate question based on statement provided: </a:t>
+            </a:r>
             <a:endParaRPr lang="en-US" sz="2400" dirty="0">
               <a:solidFill>
-                <a:srgbClr val="FFC000"/>
+                <a:schemeClr val="accent4">
+                  <a:lumMod val="60000"/>
+                  <a:lumOff val="40000"/>
+                </a:schemeClr>
               </a:solidFill>
             </a:endParaRPr>
           </a:p>
           <a:p>
-            <a:r>
-              <a:rPr lang="en-US" sz="2400" dirty="0">
-                <a:solidFill>
-                  <a:srgbClr val="FFC000"/>
+            <a:endParaRPr lang="en-US" sz="2400">
+              <a:solidFill>
+                <a:schemeClr val="accent4">
+                  <a:lumMod val="60000"/>
+                  <a:lumOff val="40000"/>
+                </a:schemeClr>
+              </a:solidFill>
+            </a:endParaRPr>
+          </a:p>
+          <a:p>
+            <a:r>
+              <a:rPr lang="en-US" sz="2400">
+                <a:solidFill>
+                  <a:schemeClr val="accent4">
+                    <a:lumMod val="60000"/>
+                    <a:lumOff val="40000"/>
+                  </a:schemeClr>
+                </a:solidFill>
+              </a:rPr>
+              <a:t>Example</a:t>
+            </a:r>
+            <a:r>
+              <a:rPr lang="en-US" sz="2400" dirty="0">
+                <a:solidFill>
+                  <a:schemeClr val="accent4">
+                    <a:lumMod val="60000"/>
+                    <a:lumOff val="40000"/>
+                  </a:schemeClr>
+                </a:solidFill>
+              </a:rPr>
+              <a:t>:</a:t>
+            </a:r>
+          </a:p>
+          <a:p>
+            <a:r>
+              <a:rPr lang="en-US" sz="2400" dirty="0">
+                <a:solidFill>
+                  <a:schemeClr val="accent4">
+                    <a:lumMod val="60000"/>
+                    <a:lumOff val="40000"/>
+                  </a:schemeClr>
+                </a:solidFill>
+              </a:rPr>
+              <a:t>Statement: "John lives in Tokyo."</a:t>
+            </a:r>
+          </a:p>
+          <a:p>
+            <a:r>
+              <a:rPr lang="en-US" sz="2400" dirty="0">
+                <a:solidFill>
+                  <a:schemeClr val="accent4">
+                    <a:lumMod val="60000"/>
+                    <a:lumOff val="40000"/>
+                  </a:schemeClr>
+                </a:solidFill>
+              </a:rPr>
+              <a:t>Question: "Where does John live?"</a:t>
+            </a:r>
+          </a:p>
+          <a:p>
+            <a:endParaRPr lang="en-US" sz="2400" dirty="0">
+              <a:solidFill>
+                <a:schemeClr val="accent4">
+                  <a:lumMod val="60000"/>
+                  <a:lumOff val="40000"/>
+                </a:schemeClr>
+              </a:solidFill>
+            </a:endParaRPr>
+          </a:p>
+          <a:p>
+            <a:r>
+              <a:rPr lang="en-US" sz="2400" dirty="0">
+                <a:solidFill>
+                  <a:schemeClr val="accent4">
+                    <a:lumMod val="60000"/>
+                    <a:lumOff val="40000"/>
+                  </a:schemeClr>
                 </a:solidFill>
               </a:rPr>
               <a:t>Statement: "The meeting starts at 10 AM."</a:t>
@@ -7847,7 +7924,10 @@
             <a:r>
               <a:rPr lang="en-US" sz="2400" dirty="0">
                 <a:solidFill>
-                  <a:srgbClr val="FFC000"/>
+                  <a:schemeClr val="accent4">
+                    <a:lumMod val="60000"/>
+                    <a:lumOff val="40000"/>
+                  </a:schemeClr>
                 </a:solidFill>
               </a:rPr>
               <a:t>Question:</a:t>
@@ -7857,10 +7937,10 @@
       </p:sp>
       <p:pic>
         <p:nvPicPr>
-          <p:cNvPr id="7" name="Picture 6">
-            <a:extLst>
-              <a:ext uri="{FF2B5EF4-FFF2-40B4-BE49-F238E27FC236}">
-                <a16:creationId xmlns:a16="http://schemas.microsoft.com/office/drawing/2014/main" id="{DC662B86-F5C5-E47C-3384-4F8FF377E131}"/>
+          <p:cNvPr id="4" name="Picture 3">
+            <a:extLst>
+              <a:ext uri="{FF2B5EF4-FFF2-40B4-BE49-F238E27FC236}">
+                <a16:creationId xmlns:a16="http://schemas.microsoft.com/office/drawing/2014/main" id="{518DDFB1-9007-A00C-B4C0-8EDD86706CA0}"/>
               </a:ext>
             </a:extLst>
           </p:cNvPr>
@@ -7877,8 +7957,8 @@
         </p:blipFill>
         <p:spPr>
           <a:xfrm>
-            <a:off x="4418833" y="3941900"/>
-            <a:ext cx="7306823" cy="2776940"/>
+            <a:off x="3612876" y="3555481"/>
+            <a:ext cx="8150090" cy="3289840"/>
           </a:xfrm>
           <a:prstGeom prst="rect">
             <a:avLst/>
@@ -7935,7 +8015,7 @@
         </p:nvSpPr>
         <p:spPr>
           <a:xfrm>
-            <a:off x="705612" y="1958794"/>
+            <a:off x="197612" y="152572"/>
             <a:ext cx="10780776" cy="1971502"/>
           </a:xfrm>
           <a:prstGeom prst="rect">
@@ -8117,7 +8197,7 @@
         </p:nvSpPr>
         <p:spPr>
           <a:xfrm>
-            <a:off x="658368" y="1657042"/>
+            <a:off x="726102" y="1036153"/>
             <a:ext cx="4736592" cy="2677656"/>
           </a:xfrm>
           <a:prstGeom prst="rect">
